--- a/docs/발표_추세분석_판정.pptx
+++ b/docs/발표_추세분석_판정.pptx
@@ -8877,7 +8877,7 @@
                 <a:ea typeface="Arial" pitchFamily="34" charset="-122"/>
                 <a:cs typeface="Arial" pitchFamily="34" charset="-120"/>
               </a:rPr>
-              <a:t>경보를 사건으로, 그리고 세기로</a:t>
+              <a:t>경보 행 51,037에서 경보 44건까지</a:t>
             </a:r>
             <a:endParaRPr lang="en-US" sz="2600" dirty="0"/>
           </a:p>
@@ -8916,26 +8916,89 @@
                 <a:ea typeface="Arial" pitchFamily="34" charset="-122"/>
                 <a:cs typeface="Arial" pitchFamily="34" charset="-120"/>
               </a:rPr>
-              <a:t>❖ early_warning은 상태다. 이상이 지속되면 매 샷 True가 되므로 그대로 세면 안 된다.</a:t>
+              <a:t>❖ early_warning은 상태다. 이상이 지속되면 매 샷 True가 되므로 행을 그대로 세면 안 된다.</a:t>
             </a:r>
             <a:endParaRPr lang="en-US" sz="1300" dirty="0"/>
           </a:p>
         </p:txBody>
       </p:sp>
-      <p:sp>
-        <p:nvSpPr>
-          <p:cNvPr id="15" name="Shape 13"/>
-          <p:cNvSpPr/>
-          <p:nvPr/>
-        </p:nvSpPr>
-        <p:spPr>
-          <a:xfrm>
-            <a:off x="566928" y="1664208"/>
-            <a:ext cx="2743200" cy="1005840"/>
+      <p:pic>
+        <p:nvPicPr>
+          <p:cNvPr id="15" name="Image 0" descr="/Users/gimsiu/Downloads/suni c 14조/docs/발표_그림_경보건수.png">    </p:cNvPr>
+          <p:cNvPicPr>
+            <a:picLocks noChangeAspect="1"/>
+          </p:cNvPicPr>
+          <p:nvPr/>
+        </p:nvPicPr>
+        <p:blipFill>
+          <a:blip r:embed="rId1"/>
+          <a:stretch>
+            <a:fillRect/>
+          </a:stretch>
+        </p:blipFill>
+        <p:spPr>
+          <a:xfrm>
+            <a:off x="566928" y="1591056"/>
+            <a:ext cx="5038344" cy="4443984"/>
+          </a:xfrm>
+          <a:prstGeom prst="rect">
+            <a:avLst/>
+          </a:prstGeom>
+        </p:spPr>
+      </p:pic>
+      <p:sp>
+        <p:nvSpPr>
+          <p:cNvPr id="16" name="Text 13"/>
+          <p:cNvSpPr/>
+          <p:nvPr/>
+        </p:nvSpPr>
+        <p:spPr>
+          <a:xfrm>
+            <a:off x="5870448" y="1627632"/>
+            <a:ext cx="5754319" cy="292608"/>
+          </a:xfrm>
+          <a:prstGeom prst="rect">
+            <a:avLst/>
+          </a:prstGeom>
+          <a:noFill/>
+          <a:ln/>
+        </p:spPr>
+        <p:txBody>
+          <a:bodyPr wrap="square" rtlCol="0" anchor="ctr"/>
+          <a:lstStyle/>
+          <a:p>
+            <a:pPr indent="0" marL="0">
+              <a:buNone/>
+            </a:pPr>
+            <a:r>
+              <a:rPr lang="en-US" sz="1500" b="1" dirty="0">
+                <a:solidFill>
+                  <a:srgbClr val="1F3B57"/>
+                </a:solidFill>
+                <a:latin typeface="Arial" pitchFamily="34" charset="0"/>
+                <a:ea typeface="Arial" pitchFamily="34" charset="-122"/>
+                <a:cs typeface="Arial" pitchFamily="34" charset="-120"/>
+              </a:rPr>
+              <a:t>44건이 다 같은 경보가 아니다</a:t>
+            </a:r>
+            <a:endParaRPr lang="en-US" sz="1500" dirty="0"/>
+          </a:p>
+        </p:txBody>
+      </p:sp>
+      <p:sp>
+        <p:nvSpPr>
+          <p:cNvPr id="17" name="Shape 14"/>
+          <p:cNvSpPr/>
+          <p:nvPr/>
+        </p:nvSpPr>
+        <p:spPr>
+          <a:xfrm>
+            <a:off x="5870448" y="2011680"/>
+            <a:ext cx="5754319" cy="1188720"/>
           </a:xfrm>
           <a:prstGeom prst="roundRect">
             <a:avLst>
-              <a:gd name="adj" fmla="val 5455"/>
+              <a:gd name="adj" fmla="val 6154"/>
             </a:avLst>
           </a:prstGeom>
           <a:solidFill>
@@ -8946,135 +9009,278 @@
       </p:sp>
       <p:sp>
         <p:nvSpPr>
-          <p:cNvPr id="16" name="Text 14"/>
-          <p:cNvSpPr/>
-          <p:nvPr/>
-        </p:nvSpPr>
-        <p:spPr>
-          <a:xfrm>
-            <a:off x="566928" y="1792224"/>
-            <a:ext cx="2743200" cy="402336"/>
-          </a:xfrm>
-          <a:prstGeom prst="rect">
-            <a:avLst/>
-          </a:prstGeom>
-          <a:noFill/>
-          <a:ln/>
-        </p:spPr>
-        <p:txBody>
-          <a:bodyPr wrap="square" rtlCol="0" anchor="ctr"/>
-          <a:lstStyle/>
-          <a:p>
-            <a:pPr algn="ctr" indent="0" marL="0">
-              <a:buNone/>
-            </a:pPr>
-            <a:r>
-              <a:rPr lang="en-US" sz="2200" b="1" dirty="0">
+          <p:cNvPr id="18" name="Text 15"/>
+          <p:cNvSpPr/>
+          <p:nvPr/>
+        </p:nvSpPr>
+        <p:spPr>
+          <a:xfrm>
+            <a:off x="6071616" y="2139696"/>
+            <a:ext cx="5351983" cy="932688"/>
+          </a:xfrm>
+          <a:prstGeom prst="rect">
+            <a:avLst/>
+          </a:prstGeom>
+          <a:noFill/>
+          <a:ln/>
+        </p:spPr>
+        <p:txBody>
+          <a:bodyPr wrap="square" rtlCol="0" anchor="ctr"/>
+          <a:lstStyle/>
+          <a:p>
+            <a:pPr indent="0" marL="0">
+              <a:lnSpc>
+                <a:spcPct val="150000"/>
+              </a:lnSpc>
+              <a:buNone/>
+            </a:pPr>
+            <a:r>
+              <a:rPr lang="en-US" sz="1050" dirty="0">
                 <a:solidFill>
                   <a:srgbClr val="1F3B57"/>
                 </a:solidFill>
-                <a:latin typeface="Arial" pitchFamily="34" charset="0"/>
-                <a:ea typeface="Arial" pitchFamily="34" charset="-122"/>
-                <a:cs typeface="Arial" pitchFamily="34" charset="-120"/>
-              </a:rPr>
-              <a:t>51,037</a:t>
-            </a:r>
-            <a:endParaRPr lang="en-US" sz="2200" dirty="0"/>
-          </a:p>
-        </p:txBody>
-      </p:sp>
-      <p:sp>
-        <p:nvSpPr>
-          <p:cNvPr id="17" name="Text 15"/>
-          <p:cNvSpPr/>
-          <p:nvPr/>
-        </p:nvSpPr>
-        <p:spPr>
-          <a:xfrm>
-            <a:off x="566928" y="2286000"/>
-            <a:ext cx="2743200" cy="274320"/>
-          </a:xfrm>
-          <a:prstGeom prst="rect">
-            <a:avLst/>
-          </a:prstGeom>
-          <a:noFill/>
-          <a:ln/>
-        </p:spPr>
-        <p:txBody>
-          <a:bodyPr wrap="square" rtlCol="0" anchor="ctr"/>
-          <a:lstStyle/>
-          <a:p>
-            <a:pPr algn="ctr" indent="0" marL="0">
+                <a:latin typeface="Courier New" pitchFamily="34" charset="0"/>
+                <a:ea typeface="Courier New" pitchFamily="34" charset="-122"/>
+                <a:cs typeface="Courier New" pitchFamily="34" charset="-120"/>
+              </a:rPr>
+              <a:t>성숙도 = min(1,  지속일 / 14)     증거가 쌓였나</a:t>
+            </a:r>
+            <a:endParaRPr lang="en-US" sz="1050" dirty="0"/>
+          </a:p>
+          <a:p>
+            <a:pPr indent="0" marL="0">
+              <a:lnSpc>
+                <a:spcPct val="150000"/>
+              </a:lnSpc>
               <a:buNone/>
             </a:pPr>
             <a:r>
               <a:rPr lang="en-US" sz="1050" dirty="0">
                 <a:solidFill>
-                  <a:srgbClr val="8494A5"/>
-                </a:solidFill>
-                <a:latin typeface="Arial" pitchFamily="34" charset="0"/>
-                <a:ea typeface="Arial" pitchFamily="34" charset="-122"/>
-                <a:cs typeface="Arial" pitchFamily="34" charset="-120"/>
-              </a:rPr>
-              <a:t>경보 행</a:t>
-            </a:r>
-            <a:endParaRPr lang="en-US" sz="1050" dirty="0"/>
-          </a:p>
-        </p:txBody>
-      </p:sp>
-      <p:sp>
-        <p:nvSpPr>
-          <p:cNvPr id="18" name="Text 16"/>
-          <p:cNvSpPr/>
-          <p:nvPr/>
-        </p:nvSpPr>
-        <p:spPr>
-          <a:xfrm>
-            <a:off x="3401568" y="1975104"/>
-            <a:ext cx="457200" cy="365760"/>
-          </a:xfrm>
-          <a:prstGeom prst="rect">
-            <a:avLst/>
-          </a:prstGeom>
-          <a:noFill/>
-          <a:ln/>
-        </p:spPr>
-        <p:txBody>
-          <a:bodyPr wrap="square" rtlCol="0" anchor="ctr"/>
-          <a:lstStyle/>
-          <a:p>
-            <a:pPr algn="ctr" indent="0" marL="0">
-              <a:buNone/>
-            </a:pPr>
-            <a:r>
-              <a:rPr lang="en-US" sz="1800" dirty="0">
-                <a:solidFill>
-                  <a:srgbClr val="8494A5"/>
-                </a:solidFill>
-                <a:latin typeface="Arial" pitchFamily="34" charset="0"/>
-                <a:ea typeface="Arial" pitchFamily="34" charset="-122"/>
-                <a:cs typeface="Arial" pitchFamily="34" charset="-120"/>
-              </a:rPr>
-              <a:t>→</a:t>
-            </a:r>
-            <a:endParaRPr lang="en-US" sz="1800" dirty="0"/>
-          </a:p>
-        </p:txBody>
-      </p:sp>
-      <p:sp>
-        <p:nvSpPr>
-          <p:cNvPr id="19" name="Shape 17"/>
-          <p:cNvSpPr/>
-          <p:nvPr/>
-        </p:nvSpPr>
-        <p:spPr>
-          <a:xfrm>
-            <a:off x="3858768" y="1664208"/>
-            <a:ext cx="2743200" cy="1005840"/>
+                  <a:srgbClr val="1F3B57"/>
+                </a:solidFill>
+                <a:latin typeface="Courier New" pitchFamily="34" charset="0"/>
+                <a:ea typeface="Courier New" pitchFamily="34" charset="-122"/>
+                <a:cs typeface="Courier New" pitchFamily="34" charset="-120"/>
+              </a:rPr>
+              <a:t>긴급도 = min(1,  14 / 도달예상일)  곧 넘나</a:t>
+            </a:r>
+            <a:endParaRPr lang="en-US" sz="1050" dirty="0"/>
+          </a:p>
+          <a:p>
+            <a:pPr indent="0" marL="0">
+              <a:lnSpc>
+                <a:spcPct val="150000"/>
+              </a:lnSpc>
+              <a:buNone/>
+            </a:pPr>
+            <a:r>
+              <a:rPr lang="en-US" sz="1050" dirty="0">
+                <a:solidFill>
+                  <a:srgbClr val="1F3B57"/>
+                </a:solidFill>
+                <a:latin typeface="Courier New" pitchFamily="34" charset="0"/>
+                <a:ea typeface="Courier New" pitchFamily="34" charset="-122"/>
+                <a:cs typeface="Courier New" pitchFamily="34" charset="-120"/>
+              </a:rPr>
+              <a:t>세기   = max(성숙도, 긴급도)</a:t>
+            </a:r>
+            <a:endParaRPr lang="en-US" sz="1050" dirty="0"/>
+          </a:p>
+        </p:txBody>
+      </p:sp>
+      <p:sp>
+        <p:nvSpPr>
+          <p:cNvPr id="19" name="Shape 16"/>
+          <p:cNvSpPr/>
+          <p:nvPr/>
+        </p:nvSpPr>
+        <p:spPr>
+          <a:xfrm>
+            <a:off x="5870448" y="3310128"/>
+            <a:ext cx="2785720" cy="1243584"/>
           </a:xfrm>
           <a:prstGeom prst="roundRect">
             <a:avLst>
-              <a:gd name="adj" fmla="val 5455"/>
+              <a:gd name="adj" fmla="val 5882"/>
+            </a:avLst>
+          </a:prstGeom>
+          <a:solidFill>
+            <a:srgbClr val="E7F4EE"/>
+          </a:solidFill>
+          <a:ln/>
+        </p:spPr>
+      </p:sp>
+      <p:sp>
+        <p:nvSpPr>
+          <p:cNvPr id="20" name="Text 17"/>
+          <p:cNvSpPr/>
+          <p:nvPr/>
+        </p:nvSpPr>
+        <p:spPr>
+          <a:xfrm>
+            <a:off x="5870448" y="3419856"/>
+            <a:ext cx="2785720" cy="292608"/>
+          </a:xfrm>
+          <a:prstGeom prst="rect">
+            <a:avLst/>
+          </a:prstGeom>
+          <a:noFill/>
+          <a:ln/>
+        </p:spPr>
+        <p:txBody>
+          <a:bodyPr wrap="square" rtlCol="0" anchor="ctr"/>
+          <a:lstStyle/>
+          <a:p>
+            <a:pPr algn="ctr" indent="0" marL="0">
+              <a:buNone/>
+            </a:pPr>
+            <a:r>
+              <a:rPr lang="en-US" sz="1600" b="1" dirty="0">
+                <a:solidFill>
+                  <a:srgbClr val="15654A"/>
+                </a:solidFill>
+                <a:latin typeface="Arial" pitchFamily="34" charset="0"/>
+                <a:ea typeface="Arial" pitchFamily="34" charset="-122"/>
+                <a:cs typeface="Arial" pitchFamily="34" charset="-120"/>
+              </a:rPr>
+              <a:t>full</a:t>
+            </a:r>
+            <a:endParaRPr lang="en-US" sz="1600" dirty="0"/>
+          </a:p>
+        </p:txBody>
+      </p:sp>
+      <p:sp>
+        <p:nvSpPr>
+          <p:cNvPr id="21" name="Text 18"/>
+          <p:cNvSpPr/>
+          <p:nvPr/>
+        </p:nvSpPr>
+        <p:spPr>
+          <a:xfrm>
+            <a:off x="5870448" y="3749040"/>
+            <a:ext cx="2785720" cy="256032"/>
+          </a:xfrm>
+          <a:prstGeom prst="rect">
+            <a:avLst/>
+          </a:prstGeom>
+          <a:noFill/>
+          <a:ln/>
+        </p:spPr>
+        <p:txBody>
+          <a:bodyPr wrap="square" rtlCol="0" anchor="ctr"/>
+          <a:lstStyle/>
+          <a:p>
+            <a:pPr algn="ctr" indent="0" marL="0">
+              <a:buNone/>
+            </a:pPr>
+            <a:r>
+              <a:rPr lang="en-US" sz="1250" b="1" dirty="0">
+                <a:solidFill>
+                  <a:srgbClr val="15654A"/>
+                </a:solidFill>
+                <a:latin typeface="Arial" pitchFamily="34" charset="0"/>
+                <a:ea typeface="Arial" pitchFamily="34" charset="-122"/>
+                <a:cs typeface="Arial" pitchFamily="34" charset="-120"/>
+              </a:rPr>
+              <a:t>9건</a:t>
+            </a:r>
+            <a:endParaRPr lang="en-US" sz="1250" dirty="0"/>
+          </a:p>
+        </p:txBody>
+      </p:sp>
+      <p:sp>
+        <p:nvSpPr>
+          <p:cNvPr id="22" name="Text 19"/>
+          <p:cNvSpPr/>
+          <p:nvPr/>
+        </p:nvSpPr>
+        <p:spPr>
+          <a:xfrm>
+            <a:off x="5870448" y="4041648"/>
+            <a:ext cx="2785720" cy="237744"/>
+          </a:xfrm>
+          <a:prstGeom prst="rect">
+            <a:avLst/>
+          </a:prstGeom>
+          <a:noFill/>
+          <a:ln/>
+        </p:spPr>
+        <p:txBody>
+          <a:bodyPr wrap="square" rtlCol="0" anchor="ctr"/>
+          <a:lstStyle/>
+          <a:p>
+            <a:pPr algn="ctr" indent="0" marL="0">
+              <a:buNone/>
+            </a:pPr>
+            <a:r>
+              <a:rPr lang="en-US" sz="1000" dirty="0">
+                <a:solidFill>
+                  <a:srgbClr val="41586E"/>
+                </a:solidFill>
+                <a:latin typeface="Arial" pitchFamily="34" charset="0"/>
+                <a:ea typeface="Arial" pitchFamily="34" charset="-122"/>
+                <a:cs typeface="Arial" pitchFamily="34" charset="-120"/>
+              </a:rPr>
+              <a:t>지속 25.4 ~ 59.5일</a:t>
+            </a:r>
+            <a:endParaRPr lang="en-US" sz="1000" dirty="0"/>
+          </a:p>
+        </p:txBody>
+      </p:sp>
+      <p:sp>
+        <p:nvSpPr>
+          <p:cNvPr id="23" name="Text 20"/>
+          <p:cNvSpPr/>
+          <p:nvPr/>
+        </p:nvSpPr>
+        <p:spPr>
+          <a:xfrm>
+            <a:off x="5870448" y="4261104"/>
+            <a:ext cx="2785720" cy="237744"/>
+          </a:xfrm>
+          <a:prstGeom prst="rect">
+            <a:avLst/>
+          </a:prstGeom>
+          <a:noFill/>
+          <a:ln/>
+        </p:spPr>
+        <p:txBody>
+          <a:bodyPr wrap="square" rtlCol="0" anchor="ctr"/>
+          <a:lstStyle/>
+          <a:p>
+            <a:pPr algn="ctr" indent="0" marL="0">
+              <a:buNone/>
+            </a:pPr>
+            <a:r>
+              <a:rPr lang="en-US" sz="950" dirty="0">
+                <a:solidFill>
+                  <a:srgbClr val="8494A5"/>
+                </a:solidFill>
+                <a:latin typeface="Arial" pitchFamily="34" charset="0"/>
+                <a:ea typeface="Arial" pitchFamily="34" charset="-122"/>
+                <a:cs typeface="Arial" pitchFamily="34" charset="-120"/>
+              </a:rPr>
+              <a:t>점수를 최대폭까지 깎음</a:t>
+            </a:r>
+            <a:endParaRPr lang="en-US" sz="950" dirty="0"/>
+          </a:p>
+        </p:txBody>
+      </p:sp>
+      <p:sp>
+        <p:nvSpPr>
+          <p:cNvPr id="24" name="Shape 21"/>
+          <p:cNvSpPr/>
+          <p:nvPr/>
+        </p:nvSpPr>
+        <p:spPr>
+          <a:xfrm>
+            <a:off x="8839048" y="3310128"/>
+            <a:ext cx="2785720" cy="1243584"/>
+          </a:xfrm>
+          <a:prstGeom prst="roundRect">
+            <a:avLst>
+              <a:gd name="adj" fmla="val 5882"/>
             </a:avLst>
           </a:prstGeom>
           <a:solidFill>
@@ -9085,14 +9291,14 @@
       </p:sp>
       <p:sp>
         <p:nvSpPr>
-          <p:cNvPr id="20" name="Text 18"/>
-          <p:cNvSpPr/>
-          <p:nvPr/>
-        </p:nvSpPr>
-        <p:spPr>
-          <a:xfrm>
-            <a:off x="3858768" y="1792224"/>
-            <a:ext cx="2743200" cy="402336"/>
+          <p:cNvPr id="25" name="Text 22"/>
+          <p:cNvSpPr/>
+          <p:nvPr/>
+        </p:nvSpPr>
+        <p:spPr>
+          <a:xfrm>
+            <a:off x="8839048" y="3419856"/>
+            <a:ext cx="2785720" cy="292608"/>
           </a:xfrm>
           <a:prstGeom prst="rect">
             <a:avLst/>
@@ -9108,30 +9314,30 @@
               <a:buNone/>
             </a:pPr>
             <a:r>
-              <a:rPr lang="en-US" sz="2200" b="1" dirty="0">
-                <a:solidFill>
-                  <a:srgbClr val="1F3B57"/>
-                </a:solidFill>
-                <a:latin typeface="Arial" pitchFamily="34" charset="0"/>
-                <a:ea typeface="Arial" pitchFamily="34" charset="-122"/>
-                <a:cs typeface="Arial" pitchFamily="34" charset="-120"/>
-              </a:rPr>
-              <a:t>5,927</a:t>
-            </a:r>
-            <a:endParaRPr lang="en-US" sz="2200" dirty="0"/>
-          </a:p>
-        </p:txBody>
-      </p:sp>
-      <p:sp>
-        <p:nvSpPr>
-          <p:cNvPr id="21" name="Text 19"/>
-          <p:cNvSpPr/>
-          <p:nvPr/>
-        </p:nvSpPr>
-        <p:spPr>
-          <a:xfrm>
-            <a:off x="3858768" y="2286000"/>
-            <a:ext cx="2743200" cy="274320"/>
+              <a:rPr lang="en-US" sz="1600" b="1" dirty="0">
+                <a:solidFill>
+                  <a:srgbClr val="8494A5"/>
+                </a:solidFill>
+                <a:latin typeface="Arial" pitchFamily="34" charset="0"/>
+                <a:ea typeface="Arial" pitchFamily="34" charset="-122"/>
+                <a:cs typeface="Arial" pitchFamily="34" charset="-120"/>
+              </a:rPr>
+              <a:t>early</a:t>
+            </a:r>
+            <a:endParaRPr lang="en-US" sz="1600" dirty="0"/>
+          </a:p>
+        </p:txBody>
+      </p:sp>
+      <p:sp>
+        <p:nvSpPr>
+          <p:cNvPr id="26" name="Text 23"/>
+          <p:cNvSpPr/>
+          <p:nvPr/>
+        </p:nvSpPr>
+        <p:spPr>
+          <a:xfrm>
+            <a:off x="8839048" y="3749040"/>
+            <a:ext cx="2785720" cy="256032"/>
           </a:xfrm>
           <a:prstGeom prst="rect">
             <a:avLst/>
@@ -9147,7 +9353,85 @@
               <a:buNone/>
             </a:pPr>
             <a:r>
-              <a:rPr lang="en-US" sz="1050" dirty="0">
+              <a:rPr lang="en-US" sz="1250" b="1" dirty="0">
+                <a:solidFill>
+                  <a:srgbClr val="41586E"/>
+                </a:solidFill>
+                <a:latin typeface="Arial" pitchFamily="34" charset="0"/>
+                <a:ea typeface="Arial" pitchFamily="34" charset="-122"/>
+                <a:cs typeface="Arial" pitchFamily="34" charset="-120"/>
+              </a:rPr>
+              <a:t>35건</a:t>
+            </a:r>
+            <a:endParaRPr lang="en-US" sz="1250" dirty="0"/>
+          </a:p>
+        </p:txBody>
+      </p:sp>
+      <p:sp>
+        <p:nvSpPr>
+          <p:cNvPr id="27" name="Text 24"/>
+          <p:cNvSpPr/>
+          <p:nvPr/>
+        </p:nvSpPr>
+        <p:spPr>
+          <a:xfrm>
+            <a:off x="8839048" y="4041648"/>
+            <a:ext cx="2785720" cy="237744"/>
+          </a:xfrm>
+          <a:prstGeom prst="rect">
+            <a:avLst/>
+          </a:prstGeom>
+          <a:noFill/>
+          <a:ln/>
+        </p:spPr>
+        <p:txBody>
+          <a:bodyPr wrap="square" rtlCol="0" anchor="ctr"/>
+          <a:lstStyle/>
+          <a:p>
+            <a:pPr algn="ctr" indent="0" marL="0">
+              <a:buNone/>
+            </a:pPr>
+            <a:r>
+              <a:rPr lang="en-US" sz="1000" dirty="0">
+                <a:solidFill>
+                  <a:srgbClr val="41586E"/>
+                </a:solidFill>
+                <a:latin typeface="Arial" pitchFamily="34" charset="0"/>
+                <a:ea typeface="Arial" pitchFamily="34" charset="-122"/>
+                <a:cs typeface="Arial" pitchFamily="34" charset="-120"/>
+              </a:rPr>
+              <a:t>지속 0.0 ~ 5.2일</a:t>
+            </a:r>
+            <a:endParaRPr lang="en-US" sz="1000" dirty="0"/>
+          </a:p>
+        </p:txBody>
+      </p:sp>
+      <p:sp>
+        <p:nvSpPr>
+          <p:cNvPr id="28" name="Text 25"/>
+          <p:cNvSpPr/>
+          <p:nvPr/>
+        </p:nvSpPr>
+        <p:spPr>
+          <a:xfrm>
+            <a:off x="8839048" y="4261104"/>
+            <a:ext cx="2785720" cy="237744"/>
+          </a:xfrm>
+          <a:prstGeom prst="rect">
+            <a:avLst/>
+          </a:prstGeom>
+          <a:noFill/>
+          <a:ln/>
+        </p:spPr>
+        <p:txBody>
+          <a:bodyPr wrap="square" rtlCol="0" anchor="ctr"/>
+          <a:lstStyle/>
+          <a:p>
+            <a:pPr algn="ctr" indent="0" marL="0">
+              <a:buNone/>
+            </a:pPr>
+            <a:r>
+              <a:rPr lang="en-US" sz="950" dirty="0">
                 <a:solidFill>
                   <a:srgbClr val="8494A5"/>
                 </a:solidFill>
@@ -9155,83 +9439,49 @@
                 <a:ea typeface="Arial" pitchFamily="34" charset="-122"/>
                 <a:cs typeface="Arial" pitchFamily="34" charset="-120"/>
               </a:rPr>
-              <a:t>독립 사건 (episode)</a:t>
-            </a:r>
-            <a:endParaRPr lang="en-US" sz="1050" dirty="0"/>
-          </a:p>
-        </p:txBody>
-      </p:sp>
-      <p:sp>
-        <p:nvSpPr>
-          <p:cNvPr id="22" name="Text 20"/>
-          <p:cNvSpPr/>
-          <p:nvPr/>
-        </p:nvSpPr>
-        <p:spPr>
-          <a:xfrm>
-            <a:off x="6693408" y="1975104"/>
-            <a:ext cx="457200" cy="365760"/>
-          </a:xfrm>
-          <a:prstGeom prst="rect">
-            <a:avLst/>
-          </a:prstGeom>
-          <a:noFill/>
-          <a:ln/>
-        </p:spPr>
-        <p:txBody>
-          <a:bodyPr wrap="square" rtlCol="0" anchor="ctr"/>
-          <a:lstStyle/>
-          <a:p>
-            <a:pPr algn="ctr" indent="0" marL="0">
-              <a:buNone/>
-            </a:pPr>
-            <a:r>
-              <a:rPr lang="en-US" sz="1800" dirty="0">
-                <a:solidFill>
-                  <a:srgbClr val="8494A5"/>
-                </a:solidFill>
-                <a:latin typeface="Arial" pitchFamily="34" charset="0"/>
-                <a:ea typeface="Arial" pitchFamily="34" charset="-122"/>
-                <a:cs typeface="Arial" pitchFamily="34" charset="-120"/>
-              </a:rPr>
-              <a:t>→</a:t>
-            </a:r>
-            <a:endParaRPr lang="en-US" sz="1800" dirty="0"/>
-          </a:p>
-        </p:txBody>
-      </p:sp>
-      <p:sp>
-        <p:nvSpPr>
-          <p:cNvPr id="23" name="Shape 21"/>
-          <p:cNvSpPr/>
-          <p:nvPr/>
-        </p:nvSpPr>
-        <p:spPr>
-          <a:xfrm>
-            <a:off x="7150608" y="1664208"/>
-            <a:ext cx="2743200" cy="1005840"/>
+              <a:t>흐리게 표시</a:t>
+            </a:r>
+            <a:endParaRPr lang="en-US" sz="950" dirty="0"/>
+          </a:p>
+        </p:txBody>
+      </p:sp>
+      <p:sp>
+        <p:nvSpPr>
+          <p:cNvPr id="29" name="Shape 26"/>
+          <p:cNvSpPr/>
+          <p:nvPr/>
+        </p:nvSpPr>
+        <p:spPr>
+          <a:xfrm>
+            <a:off x="5870448" y="4663440"/>
+            <a:ext cx="5754319" cy="566928"/>
           </a:xfrm>
           <a:prstGeom prst="roundRect">
             <a:avLst>
-              <a:gd name="adj" fmla="val 5455"/>
+              <a:gd name="adj" fmla="val 9677"/>
             </a:avLst>
           </a:prstGeom>
           <a:solidFill>
-            <a:srgbClr val="E7F4EE"/>
+            <a:srgbClr val="FFFFFF"/>
           </a:solidFill>
-          <a:ln/>
-        </p:spPr>
-      </p:sp>
-      <p:sp>
-        <p:nvSpPr>
-          <p:cNvPr id="24" name="Text 22"/>
-          <p:cNvSpPr/>
-          <p:nvPr/>
-        </p:nvSpPr>
-        <p:spPr>
-          <a:xfrm>
-            <a:off x="7150608" y="1792224"/>
-            <a:ext cx="2743200" cy="402336"/>
+          <a:ln w="13970">
+            <a:solidFill>
+              <a:srgbClr val="15654A"/>
+            </a:solidFill>
+            <a:prstDash val="solid"/>
+          </a:ln>
+        </p:spPr>
+      </p:sp>
+      <p:sp>
+        <p:nvSpPr>
+          <p:cNvPr id="30" name="Text 27"/>
+          <p:cNvSpPr/>
+          <p:nvPr/>
+        </p:nvSpPr>
+        <p:spPr>
+          <a:xfrm>
+            <a:off x="6053328" y="4773168"/>
+            <a:ext cx="5388559" cy="347472"/>
           </a:xfrm>
           <a:prstGeom prst="rect">
             <a:avLst/>
@@ -9247,7 +9497,7 @@
               <a:buNone/>
             </a:pPr>
             <a:r>
-              <a:rPr lang="en-US" sz="2200" b="1" dirty="0">
+              <a:rPr lang="en-US" sz="1250" b="1" dirty="0">
                 <a:solidFill>
                   <a:srgbClr val="15654A"/>
                 </a:solidFill>
@@ -9255,38 +9505,41 @@
                 <a:ea typeface="Arial" pitchFamily="34" charset="-122"/>
                 <a:cs typeface="Arial" pitchFamily="34" charset="-120"/>
               </a:rPr>
-              <a:t>44</a:t>
-            </a:r>
-            <a:endParaRPr lang="en-US" sz="2200" dirty="0"/>
-          </a:p>
-        </p:txBody>
-      </p:sp>
-      <p:sp>
-        <p:nvSpPr>
-          <p:cNvPr id="25" name="Text 23"/>
-          <p:cNvSpPr/>
-          <p:nvPr/>
-        </p:nvSpPr>
-        <p:spPr>
-          <a:xfrm>
-            <a:off x="7150608" y="2286000"/>
-            <a:ext cx="2743200" cy="274320"/>
-          </a:xfrm>
-          <a:prstGeom prst="rect">
-            <a:avLst/>
-          </a:prstGeom>
-          <a:noFill/>
-          <a:ln/>
-        </p:spPr>
-        <p:txBody>
-          <a:bodyPr wrap="square" rtlCol="0" anchor="ctr"/>
-          <a:lstStyle/>
-          <a:p>
-            <a:pPr algn="ctr" indent="0" marL="0">
-              <a:buNone/>
-            </a:pPr>
-            <a:r>
-              <a:rPr lang="en-US" sz="1050" dirty="0">
+              <a:t>5.2일과 25.4일 사이가 비어 있다</a:t>
+            </a:r>
+            <a:endParaRPr lang="en-US" sz="1250" dirty="0"/>
+          </a:p>
+        </p:txBody>
+      </p:sp>
+      <p:sp>
+        <p:nvSpPr>
+          <p:cNvPr id="31" name="Text 28"/>
+          <p:cNvSpPr/>
+          <p:nvPr/>
+        </p:nvSpPr>
+        <p:spPr>
+          <a:xfrm>
+            <a:off x="5870448" y="5321808"/>
+            <a:ext cx="5754319" cy="475488"/>
+          </a:xfrm>
+          <a:prstGeom prst="rect">
+            <a:avLst/>
+          </a:prstGeom>
+          <a:noFill/>
+          <a:ln/>
+        </p:spPr>
+        <p:txBody>
+          <a:bodyPr wrap="square" rtlCol="0" anchor="ctr"/>
+          <a:lstStyle/>
+          <a:p>
+            <a:pPr indent="0" marL="0">
+              <a:lnSpc>
+                <a:spcPct val="135000"/>
+              </a:lnSpc>
+              <a:buNone/>
+            </a:pPr>
+            <a:r>
+              <a:rPr lang="en-US" sz="1000" dirty="0">
                 <a:solidFill>
                   <a:srgbClr val="8494A5"/>
                 </a:solidFill>
@@ -9294,60 +9547,21 @@
                 <a:ea typeface="Arial" pitchFamily="34" charset="-122"/>
                 <a:cs typeface="Arial" pitchFamily="34" charset="-120"/>
               </a:rPr>
-              <a:t>화면에 뜨는 경보</a:t>
-            </a:r>
-            <a:endParaRPr lang="en-US" sz="1050" dirty="0"/>
-          </a:p>
-        </p:txBody>
-      </p:sp>
-      <p:sp>
-        <p:nvSpPr>
-          <p:cNvPr id="26" name="Text 24"/>
-          <p:cNvSpPr/>
-          <p:nvPr/>
-        </p:nvSpPr>
-        <p:spPr>
-          <a:xfrm>
-            <a:off x="566928" y="2798064"/>
-            <a:ext cx="11057839" cy="274320"/>
-          </a:xfrm>
-          <a:prstGeom prst="rect">
-            <a:avLst/>
-          </a:prstGeom>
-          <a:noFill/>
-          <a:ln/>
-        </p:spPr>
-        <p:txBody>
-          <a:bodyPr wrap="square" rtlCol="0" anchor="ctr"/>
-          <a:lstStyle/>
-          <a:p>
-            <a:pPr indent="0" marL="0">
-              <a:buNone/>
-            </a:pPr>
-            <a:r>
-              <a:rPr lang="en-US" sz="1100" dirty="0">
-                <a:solidFill>
-                  <a:srgbClr val="41586E"/>
-                </a:solidFill>
-                <a:latin typeface="Arial" pitchFamily="34" charset="0"/>
-                <a:ea typeface="Arial" pitchFamily="34" charset="-122"/>
-                <a:cs typeface="Arial" pitchFamily="34" charset="-120"/>
-              </a:rPr>
-              <a:t>같은 (장비, 제품, 레시피, 컬럼) 안에서 early_warning이 False → True로 바뀔 때마다 episode_id + 1</a:t>
-            </a:r>
-            <a:endParaRPr lang="en-US" sz="1100" dirty="0"/>
-          </a:p>
-        </p:txBody>
-      </p:sp>
-      <p:sp>
-        <p:nvSpPr>
-          <p:cNvPr id="27" name="Shape 25"/>
-          <p:cNvSpPr/>
-          <p:nvPr/>
-        </p:nvSpPr>
-        <p:spPr>
-          <a:xfrm>
-            <a:off x="566928" y="3218688"/>
+              <a:t>14일 선이 경계 사례를 하나도 만들지 않는다 — 12일이나 20일로 바꿔도 같은 분류가 나온다.</a:t>
+            </a:r>
+            <a:endParaRPr lang="en-US" sz="1000" dirty="0"/>
+          </a:p>
+        </p:txBody>
+      </p:sp>
+      <p:sp>
+        <p:nvSpPr>
+          <p:cNvPr id="32" name="Shape 29"/>
+          <p:cNvSpPr/>
+          <p:nvPr/>
+        </p:nvSpPr>
+        <p:spPr>
+          <a:xfrm>
+            <a:off x="566928" y="6053328"/>
             <a:ext cx="11057839" cy="0"/>
           </a:xfrm>
           <a:prstGeom prst="line">
@@ -9364,14 +9578,14 @@
       </p:sp>
       <p:sp>
         <p:nvSpPr>
-          <p:cNvPr id="28" name="Text 26"/>
-          <p:cNvSpPr/>
-          <p:nvPr/>
-        </p:nvSpPr>
-        <p:spPr>
-          <a:xfrm>
-            <a:off x="566928" y="3346704"/>
-            <a:ext cx="11057839" cy="292608"/>
+          <p:cNvPr id="33" name="Text 30"/>
+          <p:cNvSpPr/>
+          <p:nvPr/>
+        </p:nvSpPr>
+        <p:spPr>
+          <a:xfrm>
+            <a:off x="566928" y="6163056"/>
+            <a:ext cx="11057839" cy="310896"/>
           </a:xfrm>
           <a:prstGeom prst="rect">
             <a:avLst/>
@@ -9387,172 +9601,7 @@
               <a:buNone/>
             </a:pPr>
             <a:r>
-              <a:rPr lang="en-US" sz="1500" b="1" dirty="0">
-                <a:solidFill>
-                  <a:srgbClr val="1F3B57"/>
-                </a:solidFill>
-                <a:latin typeface="Arial" pitchFamily="34" charset="0"/>
-                <a:ea typeface="Arial" pitchFamily="34" charset="-122"/>
-                <a:cs typeface="Arial" pitchFamily="34" charset="-120"/>
-              </a:rPr>
-              <a:t>그리고 세기 — 44건이 다 같은 경보가 아니다</a:t>
-            </a:r>
-            <a:endParaRPr lang="en-US" sz="1500" dirty="0"/>
-          </a:p>
-        </p:txBody>
-      </p:sp>
-      <p:sp>
-        <p:nvSpPr>
-          <p:cNvPr id="29" name="Shape 27"/>
-          <p:cNvSpPr/>
-          <p:nvPr/>
-        </p:nvSpPr>
-        <p:spPr>
-          <a:xfrm>
-            <a:off x="566928" y="3730752"/>
-            <a:ext cx="5577840" cy="1207008"/>
-          </a:xfrm>
-          <a:prstGeom prst="roundRect">
-            <a:avLst>
-              <a:gd name="adj" fmla="val 6061"/>
-            </a:avLst>
-          </a:prstGeom>
-          <a:solidFill>
-            <a:srgbClr val="F2F6F9"/>
-          </a:solidFill>
-          <a:ln/>
-        </p:spPr>
-      </p:sp>
-      <p:sp>
-        <p:nvSpPr>
-          <p:cNvPr id="30" name="Text 28"/>
-          <p:cNvSpPr/>
-          <p:nvPr/>
-        </p:nvSpPr>
-        <p:spPr>
-          <a:xfrm>
-            <a:off x="786384" y="3877056"/>
-            <a:ext cx="5120640" cy="914400"/>
-          </a:xfrm>
-          <a:prstGeom prst="rect">
-            <a:avLst/>
-          </a:prstGeom>
-          <a:noFill/>
-          <a:ln/>
-        </p:spPr>
-        <p:txBody>
-          <a:bodyPr wrap="square" rtlCol="0" anchor="ctr"/>
-          <a:lstStyle/>
-          <a:p>
-            <a:pPr indent="0" marL="0">
-              <a:lnSpc>
-                <a:spcPct val="150000"/>
-              </a:lnSpc>
-              <a:buNone/>
-            </a:pPr>
-            <a:r>
-              <a:rPr lang="en-US" sz="1100" dirty="0">
-                <a:solidFill>
-                  <a:srgbClr val="1F3B57"/>
-                </a:solidFill>
-                <a:latin typeface="Courier New" pitchFamily="34" charset="0"/>
-                <a:ea typeface="Courier New" pitchFamily="34" charset="-122"/>
-                <a:cs typeface="Courier New" pitchFamily="34" charset="-120"/>
-              </a:rPr>
-              <a:t>성숙도 = min(1,  경보 지속일 / 14)      증거가 쌓였나</a:t>
-            </a:r>
-            <a:endParaRPr lang="en-US" sz="1100" dirty="0"/>
-          </a:p>
-          <a:p>
-            <a:pPr indent="0" marL="0">
-              <a:lnSpc>
-                <a:spcPct val="150000"/>
-              </a:lnSpc>
-              <a:buNone/>
-            </a:pPr>
-            <a:r>
-              <a:rPr lang="en-US" sz="1100" dirty="0">
-                <a:solidFill>
-                  <a:srgbClr val="1F3B57"/>
-                </a:solidFill>
-                <a:latin typeface="Courier New" pitchFamily="34" charset="0"/>
-                <a:ea typeface="Courier New" pitchFamily="34" charset="-122"/>
-                <a:cs typeface="Courier New" pitchFamily="34" charset="-120"/>
-              </a:rPr>
-              <a:t>긴급도 = min(1,  14 / 도달 예상일)      곧 넘나</a:t>
-            </a:r>
-            <a:endParaRPr lang="en-US" sz="1100" dirty="0"/>
-          </a:p>
-          <a:p>
-            <a:pPr indent="0" marL="0">
-              <a:lnSpc>
-                <a:spcPct val="150000"/>
-              </a:lnSpc>
-              <a:buNone/>
-            </a:pPr>
-            <a:r>
-              <a:rPr lang="en-US" sz="1100" dirty="0">
-                <a:solidFill>
-                  <a:srgbClr val="1F3B57"/>
-                </a:solidFill>
-                <a:latin typeface="Courier New" pitchFamily="34" charset="0"/>
-                <a:ea typeface="Courier New" pitchFamily="34" charset="-122"/>
-                <a:cs typeface="Courier New" pitchFamily="34" charset="-120"/>
-              </a:rPr>
-              <a:t>세기   = max(성숙도, 긴급도)</a:t>
-            </a:r>
-            <a:endParaRPr lang="en-US" sz="1100" dirty="0"/>
-          </a:p>
-        </p:txBody>
-      </p:sp>
-      <p:sp>
-        <p:nvSpPr>
-          <p:cNvPr id="31" name="Shape 29"/>
-          <p:cNvSpPr/>
-          <p:nvPr/>
-        </p:nvSpPr>
-        <p:spPr>
-          <a:xfrm>
-            <a:off x="6446520" y="3730752"/>
-            <a:ext cx="2487168" cy="1207008"/>
-          </a:xfrm>
-          <a:prstGeom prst="roundRect">
-            <a:avLst>
-              <a:gd name="adj" fmla="val 6061"/>
-            </a:avLst>
-          </a:prstGeom>
-          <a:solidFill>
-            <a:srgbClr val="E7F4EE"/>
-          </a:solidFill>
-          <a:ln/>
-        </p:spPr>
-      </p:sp>
-      <p:sp>
-        <p:nvSpPr>
-          <p:cNvPr id="32" name="Text 30"/>
-          <p:cNvSpPr/>
-          <p:nvPr/>
-        </p:nvSpPr>
-        <p:spPr>
-          <a:xfrm>
-            <a:off x="6446520" y="3840480"/>
-            <a:ext cx="2487168" cy="274320"/>
-          </a:xfrm>
-          <a:prstGeom prst="rect">
-            <a:avLst/>
-          </a:prstGeom>
-          <a:noFill/>
-          <a:ln/>
-        </p:spPr>
-        <p:txBody>
-          <a:bodyPr wrap="square" rtlCol="0" anchor="ctr"/>
-          <a:lstStyle/>
-          <a:p>
-            <a:pPr algn="ctr" indent="0" marL="0">
-              <a:buNone/>
-            </a:pPr>
-            <a:r>
-              <a:rPr lang="en-US" sz="1500" b="1" dirty="0">
+              <a:rPr lang="en-US" sz="1300" b="1" dirty="0">
                 <a:solidFill>
                   <a:srgbClr val="15654A"/>
                 </a:solidFill>
@@ -9560,355 +9609,21 @@
                 <a:ea typeface="Arial" pitchFamily="34" charset="-122"/>
                 <a:cs typeface="Arial" pitchFamily="34" charset="-120"/>
               </a:rPr>
-              <a:t>full</a:t>
-            </a:r>
-            <a:endParaRPr lang="en-US" sz="1500" dirty="0"/>
-          </a:p>
-        </p:txBody>
-      </p:sp>
-      <p:sp>
-        <p:nvSpPr>
-          <p:cNvPr id="33" name="Text 31"/>
-          <p:cNvSpPr/>
-          <p:nvPr/>
-        </p:nvSpPr>
-        <p:spPr>
-          <a:xfrm>
-            <a:off x="6446520" y="4169664"/>
-            <a:ext cx="2487168" cy="237744"/>
-          </a:xfrm>
-          <a:prstGeom prst="rect">
-            <a:avLst/>
-          </a:prstGeom>
-          <a:noFill/>
-          <a:ln/>
-        </p:spPr>
-        <p:txBody>
-          <a:bodyPr wrap="square" rtlCol="0" anchor="ctr"/>
-          <a:lstStyle/>
-          <a:p>
-            <a:pPr algn="ctr" indent="0" marL="0">
-              <a:buNone/>
-            </a:pPr>
-            <a:r>
-              <a:rPr lang="en-US" sz="1050" dirty="0">
-                <a:solidFill>
-                  <a:srgbClr val="41586E"/>
-                </a:solidFill>
-                <a:latin typeface="Arial" pitchFamily="34" charset="0"/>
-                <a:ea typeface="Arial" pitchFamily="34" charset="-122"/>
-                <a:cs typeface="Arial" pitchFamily="34" charset="-120"/>
-              </a:rPr>
-              <a:t>세기 ≥ 1.0 · 9건</a:t>
-            </a:r>
-            <a:endParaRPr lang="en-US" sz="1050" dirty="0"/>
-          </a:p>
-        </p:txBody>
-      </p:sp>
-      <p:sp>
-        <p:nvSpPr>
-          <p:cNvPr id="34" name="Text 32"/>
-          <p:cNvSpPr/>
-          <p:nvPr/>
-        </p:nvSpPr>
-        <p:spPr>
-          <a:xfrm>
-            <a:off x="6446520" y="4425696"/>
-            <a:ext cx="2487168" cy="237744"/>
-          </a:xfrm>
-          <a:prstGeom prst="rect">
-            <a:avLst/>
-          </a:prstGeom>
-          <a:noFill/>
-          <a:ln/>
-        </p:spPr>
-        <p:txBody>
-          <a:bodyPr wrap="square" rtlCol="0" anchor="ctr"/>
-          <a:lstStyle/>
-          <a:p>
-            <a:pPr algn="ctr" indent="0" marL="0">
-              <a:buNone/>
-            </a:pPr>
-            <a:r>
-              <a:rPr lang="en-US" sz="1050" dirty="0">
-                <a:solidFill>
-                  <a:srgbClr val="8494A5"/>
-                </a:solidFill>
-                <a:latin typeface="Arial" pitchFamily="34" charset="0"/>
-                <a:ea typeface="Arial" pitchFamily="34" charset="-122"/>
-                <a:cs typeface="Arial" pitchFamily="34" charset="-120"/>
-              </a:rPr>
-              <a:t>지속 25.4 ~ 59.5일</a:t>
-            </a:r>
-            <a:endParaRPr lang="en-US" sz="1050" dirty="0"/>
-          </a:p>
-        </p:txBody>
-      </p:sp>
-      <p:sp>
-        <p:nvSpPr>
-          <p:cNvPr id="35" name="Text 33"/>
-          <p:cNvSpPr/>
-          <p:nvPr/>
-        </p:nvSpPr>
-        <p:spPr>
-          <a:xfrm>
-            <a:off x="6446520" y="4645152"/>
-            <a:ext cx="2487168" cy="237744"/>
-          </a:xfrm>
-          <a:prstGeom prst="rect">
-            <a:avLst/>
-          </a:prstGeom>
-          <a:noFill/>
-          <a:ln/>
-        </p:spPr>
-        <p:txBody>
-          <a:bodyPr wrap="square" rtlCol="0" anchor="ctr"/>
-          <a:lstStyle/>
-          <a:p>
-            <a:pPr algn="ctr" indent="0" marL="0">
-              <a:buNone/>
-            </a:pPr>
-            <a:r>
-              <a:rPr lang="en-US" sz="950" dirty="0">
-                <a:solidFill>
-                  <a:srgbClr val="8494A5"/>
-                </a:solidFill>
-                <a:latin typeface="Arial" pitchFamily="34" charset="0"/>
-                <a:ea typeface="Arial" pitchFamily="34" charset="-122"/>
-                <a:cs typeface="Arial" pitchFamily="34" charset="-120"/>
-              </a:rPr>
-              <a:t>점수를 최대폭까지 깎음</a:t>
-            </a:r>
-            <a:endParaRPr lang="en-US" sz="950" dirty="0"/>
-          </a:p>
-        </p:txBody>
-      </p:sp>
-      <p:sp>
-        <p:nvSpPr>
-          <p:cNvPr id="36" name="Shape 34"/>
-          <p:cNvSpPr/>
-          <p:nvPr/>
-        </p:nvSpPr>
-        <p:spPr>
-          <a:xfrm>
-            <a:off x="9134856" y="3730752"/>
-            <a:ext cx="2487168" cy="1207008"/>
-          </a:xfrm>
-          <a:prstGeom prst="roundRect">
-            <a:avLst>
-              <a:gd name="adj" fmla="val 6061"/>
-            </a:avLst>
-          </a:prstGeom>
-          <a:solidFill>
-            <a:srgbClr val="F2F6F9"/>
-          </a:solidFill>
-          <a:ln/>
-        </p:spPr>
-      </p:sp>
-      <p:sp>
-        <p:nvSpPr>
-          <p:cNvPr id="37" name="Text 35"/>
-          <p:cNvSpPr/>
-          <p:nvPr/>
-        </p:nvSpPr>
-        <p:spPr>
-          <a:xfrm>
-            <a:off x="9134856" y="3840480"/>
-            <a:ext cx="2487168" cy="274320"/>
-          </a:xfrm>
-          <a:prstGeom prst="rect">
-            <a:avLst/>
-          </a:prstGeom>
-          <a:noFill/>
-          <a:ln/>
-        </p:spPr>
-        <p:txBody>
-          <a:bodyPr wrap="square" rtlCol="0" anchor="ctr"/>
-          <a:lstStyle/>
-          <a:p>
-            <a:pPr algn="ctr" indent="0" marL="0">
-              <a:buNone/>
-            </a:pPr>
-            <a:r>
-              <a:rPr lang="en-US" sz="1500" b="1" dirty="0">
-                <a:solidFill>
-                  <a:srgbClr val="8494A5"/>
-                </a:solidFill>
-                <a:latin typeface="Arial" pitchFamily="34" charset="0"/>
-                <a:ea typeface="Arial" pitchFamily="34" charset="-122"/>
-                <a:cs typeface="Arial" pitchFamily="34" charset="-120"/>
-              </a:rPr>
-              <a:t>early</a:t>
-            </a:r>
-            <a:endParaRPr lang="en-US" sz="1500" dirty="0"/>
-          </a:p>
-        </p:txBody>
-      </p:sp>
-      <p:sp>
-        <p:nvSpPr>
-          <p:cNvPr id="38" name="Text 36"/>
-          <p:cNvSpPr/>
-          <p:nvPr/>
-        </p:nvSpPr>
-        <p:spPr>
-          <a:xfrm>
-            <a:off x="9134856" y="4169664"/>
-            <a:ext cx="2487168" cy="237744"/>
-          </a:xfrm>
-          <a:prstGeom prst="rect">
-            <a:avLst/>
-          </a:prstGeom>
-          <a:noFill/>
-          <a:ln/>
-        </p:spPr>
-        <p:txBody>
-          <a:bodyPr wrap="square" rtlCol="0" anchor="ctr"/>
-          <a:lstStyle/>
-          <a:p>
-            <a:pPr algn="ctr" indent="0" marL="0">
-              <a:buNone/>
-            </a:pPr>
-            <a:r>
-              <a:rPr lang="en-US" sz="1050" dirty="0">
-                <a:solidFill>
-                  <a:srgbClr val="41586E"/>
-                </a:solidFill>
-                <a:latin typeface="Arial" pitchFamily="34" charset="0"/>
-                <a:ea typeface="Arial" pitchFamily="34" charset="-122"/>
-                <a:cs typeface="Arial" pitchFamily="34" charset="-120"/>
-              </a:rPr>
-              <a:t>세기 &lt; 1.0 · 35건</a:t>
-            </a:r>
-            <a:endParaRPr lang="en-US" sz="1050" dirty="0"/>
-          </a:p>
-        </p:txBody>
-      </p:sp>
-      <p:sp>
-        <p:nvSpPr>
-          <p:cNvPr id="39" name="Text 37"/>
-          <p:cNvSpPr/>
-          <p:nvPr/>
-        </p:nvSpPr>
-        <p:spPr>
-          <a:xfrm>
-            <a:off x="9134856" y="4425696"/>
-            <a:ext cx="2487168" cy="237744"/>
-          </a:xfrm>
-          <a:prstGeom prst="rect">
-            <a:avLst/>
-          </a:prstGeom>
-          <a:noFill/>
-          <a:ln/>
-        </p:spPr>
-        <p:txBody>
-          <a:bodyPr wrap="square" rtlCol="0" anchor="ctr"/>
-          <a:lstStyle/>
-          <a:p>
-            <a:pPr algn="ctr" indent="0" marL="0">
-              <a:buNone/>
-            </a:pPr>
-            <a:r>
-              <a:rPr lang="en-US" sz="1050" dirty="0">
-                <a:solidFill>
-                  <a:srgbClr val="8494A5"/>
-                </a:solidFill>
-                <a:latin typeface="Arial" pitchFamily="34" charset="0"/>
-                <a:ea typeface="Arial" pitchFamily="34" charset="-122"/>
-                <a:cs typeface="Arial" pitchFamily="34" charset="-120"/>
-              </a:rPr>
-              <a:t>지속 0.0 ~ 5.2일</a:t>
-            </a:r>
-            <a:endParaRPr lang="en-US" sz="1050" dirty="0"/>
-          </a:p>
-        </p:txBody>
-      </p:sp>
-      <p:sp>
-        <p:nvSpPr>
-          <p:cNvPr id="40" name="Text 38"/>
-          <p:cNvSpPr/>
-          <p:nvPr/>
-        </p:nvSpPr>
-        <p:spPr>
-          <a:xfrm>
-            <a:off x="9134856" y="4645152"/>
-            <a:ext cx="2487168" cy="237744"/>
-          </a:xfrm>
-          <a:prstGeom prst="rect">
-            <a:avLst/>
-          </a:prstGeom>
-          <a:noFill/>
-          <a:ln/>
-        </p:spPr>
-        <p:txBody>
-          <a:bodyPr wrap="square" rtlCol="0" anchor="ctr"/>
-          <a:lstStyle/>
-          <a:p>
-            <a:pPr algn="ctr" indent="0" marL="0">
-              <a:buNone/>
-            </a:pPr>
-            <a:r>
-              <a:rPr lang="en-US" sz="950" dirty="0">
-                <a:solidFill>
-                  <a:srgbClr val="8494A5"/>
-                </a:solidFill>
-                <a:latin typeface="Arial" pitchFamily="34" charset="0"/>
-                <a:ea typeface="Arial" pitchFamily="34" charset="-122"/>
-                <a:cs typeface="Arial" pitchFamily="34" charset="-120"/>
-              </a:rPr>
-              <a:t>흐리게 표시</a:t>
-            </a:r>
-            <a:endParaRPr lang="en-US" sz="950" dirty="0"/>
-          </a:p>
-        </p:txBody>
-      </p:sp>
-      <p:sp>
-        <p:nvSpPr>
-          <p:cNvPr id="41" name="Text 39"/>
-          <p:cNvSpPr/>
-          <p:nvPr/>
-        </p:nvSpPr>
-        <p:spPr>
-          <a:xfrm>
-            <a:off x="566928" y="5084064"/>
-            <a:ext cx="11057839" cy="274320"/>
-          </a:xfrm>
-          <a:prstGeom prst="rect">
-            <a:avLst/>
-          </a:prstGeom>
-          <a:noFill/>
-          <a:ln/>
-        </p:spPr>
-        <p:txBody>
-          <a:bodyPr wrap="square" rtlCol="0" anchor="ctr"/>
-          <a:lstStyle/>
-          <a:p>
-            <a:pPr indent="0" marL="0">
-              <a:buNone/>
-            </a:pPr>
-            <a:r>
-              <a:rPr lang="en-US" sz="1200" b="1" dirty="0">
-                <a:solidFill>
-                  <a:srgbClr val="1F3B57"/>
-                </a:solidFill>
-                <a:latin typeface="Arial" pitchFamily="34" charset="0"/>
-                <a:ea typeface="Arial" pitchFamily="34" charset="-122"/>
-                <a:cs typeface="Arial" pitchFamily="34" charset="-120"/>
-              </a:rPr>
-              <a:t>5.2일과 25.4일 사이가 비어 있다 — 14일 선이 경계 사례를 하나도 만들지 않는다.</a:t>
-            </a:r>
-            <a:endParaRPr lang="en-US" sz="1200" dirty="0"/>
-          </a:p>
-        </p:txBody>
-      </p:sp>
-      <p:sp>
-        <p:nvSpPr>
-          <p:cNvPr id="42" name="Text 40"/>
-          <p:cNvSpPr/>
-          <p:nvPr/>
-        </p:nvSpPr>
-        <p:spPr>
-          <a:xfrm>
-            <a:off x="566928" y="5431536"/>
+              <a:t>→ boolean 하나로 칠하면 '39.6일째'와 '0.2일째'가 같은 배지를 받는다.</a:t>
+            </a:r>
+            <a:endParaRPr lang="en-US" sz="1300" dirty="0"/>
+          </a:p>
+        </p:txBody>
+      </p:sp>
+      <p:sp>
+        <p:nvSpPr>
+          <p:cNvPr id="34" name="Text 31"/>
+          <p:cNvSpPr/>
+          <p:nvPr/>
+        </p:nvSpPr>
+        <p:spPr>
+          <a:xfrm>
+            <a:off x="566928" y="6528816"/>
             <a:ext cx="11057839" cy="219456"/>
           </a:xfrm>
           <a:prstGeom prst="rect">
@@ -9939,68 +9654,6 @@
               <a:t>· 이 구분이 없던 때는 활성 경보 76건 중 63건이 세기 0.5 미만이었고 그 63건의 HI가 전부 96 이상이었다 — 'HI 99인데 빨간 경보'가 화면의 기본 상태였다.</a:t>
             </a:r>
             <a:endParaRPr lang="en-US" sz="950" dirty="0"/>
-          </a:p>
-        </p:txBody>
-      </p:sp>
-      <p:sp>
-        <p:nvSpPr>
-          <p:cNvPr id="43" name="Shape 41"/>
-          <p:cNvSpPr/>
-          <p:nvPr/>
-        </p:nvSpPr>
-        <p:spPr>
-          <a:xfrm>
-            <a:off x="566928" y="6053328"/>
-            <a:ext cx="11057839" cy="0"/>
-          </a:xfrm>
-          <a:prstGeom prst="line">
-            <a:avLst/>
-          </a:prstGeom>
-          <a:noFill/>
-          <a:ln w="9525">
-            <a:solidFill>
-              <a:srgbClr val="DCE3EA"/>
-            </a:solidFill>
-            <a:prstDash val="solid"/>
-          </a:ln>
-        </p:spPr>
-      </p:sp>
-      <p:sp>
-        <p:nvSpPr>
-          <p:cNvPr id="44" name="Text 42"/>
-          <p:cNvSpPr/>
-          <p:nvPr/>
-        </p:nvSpPr>
-        <p:spPr>
-          <a:xfrm>
-            <a:off x="566928" y="6163056"/>
-            <a:ext cx="11057839" cy="310896"/>
-          </a:xfrm>
-          <a:prstGeom prst="rect">
-            <a:avLst/>
-          </a:prstGeom>
-          <a:noFill/>
-          <a:ln/>
-        </p:spPr>
-        <p:txBody>
-          <a:bodyPr wrap="square" rtlCol="0" anchor="ctr"/>
-          <a:lstStyle/>
-          <a:p>
-            <a:pPr indent="0" marL="0">
-              <a:buNone/>
-            </a:pPr>
-            <a:r>
-              <a:rPr lang="en-US" sz="1300" b="1" dirty="0">
-                <a:solidFill>
-                  <a:srgbClr val="15654A"/>
-                </a:solidFill>
-                <a:latin typeface="Arial" pitchFamily="34" charset="0"/>
-                <a:ea typeface="Arial" pitchFamily="34" charset="-122"/>
-                <a:cs typeface="Arial" pitchFamily="34" charset="-120"/>
-              </a:rPr>
-              <a:t>→ boolean 하나로 칠하면 '39.6일째'와 '0.2일째'가 같은 배지를 받는다.</a:t>
-            </a:r>
-            <a:endParaRPr lang="en-US" sz="1300" dirty="0"/>
           </a:p>
         </p:txBody>
       </p:sp>

--- a/docs/발표_추세분석_판정.pptx
+++ b/docs/발표_추세분석_판정.pptx
@@ -5919,7 +5919,7 @@
                 <a:ea typeface="Arial" pitchFamily="34" charset="-122"/>
                 <a:cs typeface="Arial" pitchFamily="34" charset="-120"/>
               </a:rPr>
-              <a:t>쪼개도 경계가 같아야 과적합이 아니다</a:t>
+              <a:t>검증 세 가지 — 성격이 다르다</a:t>
             </a:r>
             <a:endParaRPr lang="en-US" sz="1250" dirty="0"/>
           </a:p>
@@ -6080,7 +6080,7 @@
                 <a:ea typeface="Arial" pitchFamily="34" charset="-122"/>
                 <a:cs typeface="Arial" pitchFamily="34" charset="-120"/>
               </a:rPr>
-              <a:t>컬럼 홀/짝 반으로</a:t>
+              <a:t>안정성 — 컬럼 홀/짝 반으로</a:t>
             </a:r>
             <a:endParaRPr lang="en-US" sz="1050" dirty="0"/>
           </a:p>
@@ -6180,7 +6180,7 @@
                 <a:ea typeface="Arial" pitchFamily="34" charset="-122"/>
                 <a:cs typeface="Arial" pitchFamily="34" charset="-120"/>
               </a:rPr>
-              <a:t>기간 전/후 반으로</a:t>
+              <a:t>안정성 — 기간 전/후 반으로</a:t>
             </a:r>
             <a:endParaRPr lang="en-US" sz="1050" dirty="0"/>
           </a:p>
@@ -6280,7 +6280,7 @@
                 <a:ea typeface="Arial" pitchFamily="34" charset="-122"/>
                 <a:cs typeface="Arial" pitchFamily="34" charset="-120"/>
               </a:rPr>
-              <a:t>장비 하나씩 빼고 학습</a:t>
+              <a:t>교차검증 — 장비 하나씩 빼고</a:t>
             </a:r>
             <a:endParaRPr lang="en-US" sz="1050" dirty="0"/>
           </a:p>
@@ -6380,7 +6380,7 @@
                 <a:ea typeface="Arial" pitchFamily="34" charset="-122"/>
                 <a:cs typeface="Arial" pitchFamily="34" charset="-120"/>
               </a:rPr>
-              <a:t>H는 K만큼 강한 근거가 아니다</a:t>
+              <a:t>검증 못 한 것 — 먼저 말한다</a:t>
             </a:r>
             <a:endParaRPr lang="en-US" sz="1100" dirty="0"/>
           </a:p>
@@ -6422,7 +6422,7 @@
                 <a:ea typeface="Arial" pitchFamily="34" charset="-122"/>
                 <a:cs typeface="Arial" pitchFamily="34" charset="-120"/>
               </a:rPr>
-              <a:t>4.0 ~ 4.5는 이 데이터로 우열을 못 가린다 —</a:t>
+              <a:t>정상 장비가 DP01 하나뿐이라 오탐 기준은 홀드아웃이 불가능하다.</a:t>
             </a:r>
             <a:endParaRPr lang="en-US" sz="980" dirty="0"/>
           </a:p>
@@ -6442,7 +6442,7 @@
                 <a:ea typeface="Arial" pitchFamily="34" charset="-122"/>
                 <a:cs typeface="Arial" pitchFamily="34" charset="-120"/>
               </a:rPr>
-              <a:t>4.0이 Head_Temp를 2일 빨리 잡고, 4.5가 경보를 13% 적게 낸다.</a:t>
+              <a:t>교차검증된 건 탐지 쪽이고, 오탐 쪽은 안정성 검사까지다.</a:t>
             </a:r>
             <a:endParaRPr lang="en-US" sz="980" dirty="0"/>
           </a:p>
@@ -6504,7 +6504,7 @@
                 <a:ea typeface="Arial" pitchFamily="34" charset="-122"/>
                 <a:cs typeface="Arial" pitchFamily="34" charset="-120"/>
               </a:rPr>
-              <a:t>→ (0.70, 4.5)는 상하좌우 이웃이 모두 통과다. 경계에 걸친 값이 아니다.</a:t>
+              <a:t>→ K는 손잡이가 하나고 단조라 맞출 자유도가 애초에 작다. (0.70, 4.5)는 이웃이 모두 통과다.</a:t>
             </a:r>
             <a:endParaRPr lang="en-US" sz="1300" dirty="0"/>
           </a:p>
